--- a/lecture_pptx/out/work02.pptx
+++ b/lecture_pptx/out/work02.pptx
@@ -1551,7 +1551,7 @@
                 <a:ea typeface="Yu Gothic UI Semibold" pitchFamily="34" charset="-122"/>
                 <a:cs typeface="Yu Gothic UI Semibold" pitchFamily="34" charset="-120"/>
               </a:rPr>
-              <a:t>LP → 公式LINE 連携を本番運用へ</a:t>
+              <a:t>リッチメニュー + アイコン画像の制作</a:t>
             </a:r>
             <a:endParaRPr lang="en-US" sz="3400" dirty="0"/>
           </a:p>
@@ -1590,7 +1590,7 @@
                 <a:ea typeface="Yu Gothic UI" pitchFamily="34" charset="-122"/>
                 <a:cs typeface="Yu Gothic UI" pitchFamily="34" charset="-120"/>
               </a:rPr>
-              <a:t>AIDMA を回して、登録率と予約率を数字で改善する</a:t>
+              <a:t>公式LINE の「見た目」を AI で仕上げ、次回そのまま設定できる素材を完成</a:t>
             </a:r>
             <a:endParaRPr lang="en-US" sz="1600" dirty="0"/>
           </a:p>
@@ -1806,7 +1806,7 @@
                 <a:ea typeface="Yu Gothic UI Semibold" pitchFamily="34" charset="-122"/>
                 <a:cs typeface="Yu Gothic UI Semibold" pitchFamily="34" charset="-120"/>
               </a:rPr>
-              <a:t>登録率を計測する</a:t>
+              <a:t>リッチメニュー1枚を完成</a:t>
             </a:r>
             <a:endParaRPr lang="en-US" sz="1400" dirty="0"/>
           </a:p>
@@ -1845,7 +1845,7 @@
                 <a:ea typeface="Yu Gothic UI" pitchFamily="34" charset="-122"/>
                 <a:cs typeface="Yu Gothic UI" pitchFamily="34" charset="-120"/>
               </a:rPr>
-              <a:t>LP 訪問数→公式LINE 登録の割合を毎週確認できる状態にする。</a:t>
+              <a:t>タップ領域3〜6個の画像を AI で生成し、書き出しまで完了させる。</a:t>
             </a:r>
             <a:endParaRPr lang="en-US" sz="1100" dirty="0"/>
           </a:p>
@@ -1970,7 +1970,7 @@
                 <a:ea typeface="Yu Gothic UI Semibold" pitchFamily="34" charset="-122"/>
                 <a:cs typeface="Yu Gothic UI Semibold" pitchFamily="34" charset="-120"/>
               </a:rPr>
-              <a:t>配信PDCA を回す</a:t>
+              <a:t>アイコン画像を準備</a:t>
             </a:r>
             <a:endParaRPr lang="en-US" sz="1400" dirty="0"/>
           </a:p>
@@ -2009,7 +2009,7 @@
                 <a:ea typeface="Yu Gothic UI" pitchFamily="34" charset="-122"/>
                 <a:cs typeface="Yu Gothic UI" pitchFamily="34" charset="-120"/>
               </a:rPr>
-              <a:t>反応率をもとに次回配信を AI と一緒に改善するサイクルを定着させる。</a:t>
+              <a:t>生成 AI またはストックフォトで、3軸トーンに合う1枚を確定。</a:t>
             </a:r>
             <a:endParaRPr lang="en-US" sz="1100" dirty="0"/>
           </a:p>
@@ -2134,7 +2134,7 @@
                 <a:ea typeface="Yu Gothic UI Semibold" pitchFamily="34" charset="-122"/>
                 <a:cs typeface="Yu Gothic UI Semibold" pitchFamily="34" charset="-120"/>
               </a:rPr>
-              <a:t>リッチメニュー+導線完成</a:t>
+              <a:t>次回ですぐ設定可能に</a:t>
             </a:r>
             <a:endParaRPr lang="en-US" sz="1400" dirty="0"/>
           </a:p>
@@ -2173,7 +2173,7 @@
                 <a:ea typeface="Yu Gothic UI" pitchFamily="34" charset="-122"/>
                 <a:cs typeface="Yu Gothic UI" pitchFamily="34" charset="-120"/>
               </a:rPr>
-              <a:t>公式LINE のリッチメニューを設置し、LP→LINE→予約 を一本化する。</a:t>
+              <a:t>画像ファイル(PNG/JPG)とタップ座標表をスプシで保管し、次回はアップロードのみ。</a:t>
             </a:r>
             <a:endParaRPr lang="en-US" sz="1100" dirty="0"/>
           </a:p>
@@ -2264,7 +2264,7 @@
                 <a:ea typeface="Yu Gothic UI Semibold" pitchFamily="34" charset="-122"/>
                 <a:cs typeface="Yu Gothic UI Semibold" pitchFamily="34" charset="-120"/>
               </a:rPr>
-              <a:t>STEP1: 抑えておきたい KPI と用語</a:t>
+              <a:t>STEP1: 抑えておきたい用語と仕様</a:t>
             </a:r>
             <a:endParaRPr lang="en-US" sz="2200" dirty="0"/>
           </a:p>
@@ -2372,7 +2372,7 @@
                 <a:ea typeface="Yu Gothic UI Semibold" pitchFamily="34" charset="-122"/>
                 <a:cs typeface="Yu Gothic UI Semibold" pitchFamily="34" charset="-120"/>
               </a:rPr>
-              <a:t>CVR(コンバージョン率)</a:t>
+              <a:t>リッチメニュー</a:t>
             </a:r>
             <a:endParaRPr lang="en-US" sz="1300" dirty="0"/>
           </a:p>
@@ -2414,7 +2414,7 @@
                 <a:ea typeface="Yu Gothic UI" pitchFamily="34" charset="-122"/>
                 <a:cs typeface="Yu Gothic UI" pitchFamily="34" charset="-120"/>
               </a:rPr>
-              <a:t>LP 訪問者のうち、目的の行動(LINE登録/予約)に進んだ割合。</a:t>
+              <a:t>公式LINE のトーク画面下部に表示される、タップで反応するメニュー画像(2500×1686 推奨)。</a:t>
             </a:r>
             <a:endParaRPr lang="en-US" sz="1100" dirty="0"/>
           </a:p>
@@ -2522,7 +2522,7 @@
                 <a:ea typeface="Yu Gothic UI Semibold" pitchFamily="34" charset="-122"/>
                 <a:cs typeface="Yu Gothic UI Semibold" pitchFamily="34" charset="-120"/>
               </a:rPr>
-              <a:t>リーチ/開封率</a:t>
+              <a:t>アイコン画像</a:t>
             </a:r>
             <a:endParaRPr lang="en-US" sz="1300" dirty="0"/>
           </a:p>
@@ -2564,7 +2564,7 @@
                 <a:ea typeface="Yu Gothic UI" pitchFamily="34" charset="-122"/>
                 <a:cs typeface="Yu Gothic UI" pitchFamily="34" charset="-120"/>
               </a:rPr>
-              <a:t>LINE 配信が「届いた人/読まれた割合」。開封率が低いと配信内容を見直す。</a:t>
+              <a:t>公式LINE のプロフィール画像。第一印象を決める「丸い小さい1枚」。</a:t>
             </a:r>
             <a:endParaRPr lang="en-US" sz="1100" dirty="0"/>
           </a:p>
@@ -2672,7 +2672,7 @@
                 <a:ea typeface="Yu Gothic UI Semibold" pitchFamily="34" charset="-122"/>
                 <a:cs typeface="Yu Gothic UI Semibold" pitchFamily="34" charset="-120"/>
               </a:rPr>
-              <a:t>A/B テスト</a:t>
+              <a:t>画像生成AI</a:t>
             </a:r>
             <a:endParaRPr lang="en-US" sz="1300" dirty="0"/>
           </a:p>
@@ -2714,7 +2714,7 @@
                 <a:ea typeface="Yu Gothic UI" pitchFamily="34" charset="-122"/>
                 <a:cs typeface="Yu Gothic UI" pitchFamily="34" charset="-120"/>
               </a:rPr>
-              <a:t>同じ目的に対し2案を出し、反応のよい方を採用する検証手法。</a:t>
+              <a:t>プロンプトで画像を作る AI(Gemini, Midjourney, DALL-E など)。商用利用可否は要確認。</a:t>
             </a:r>
             <a:endParaRPr lang="en-US" sz="1100" dirty="0"/>
           </a:p>
@@ -2822,7 +2822,7 @@
                 <a:ea typeface="Yu Gothic UI Semibold" pitchFamily="34" charset="-122"/>
                 <a:cs typeface="Yu Gothic UI Semibold" pitchFamily="34" charset="-120"/>
               </a:rPr>
-              <a:t>PDCA</a:t>
+              <a:t>ストックフォト</a:t>
             </a:r>
             <a:endParaRPr lang="en-US" sz="1300" dirty="0"/>
           </a:p>
@@ -2864,7 +2864,7 @@
                 <a:ea typeface="Yu Gothic UI" pitchFamily="34" charset="-122"/>
                 <a:cs typeface="Yu Gothic UI" pitchFamily="34" charset="-120"/>
               </a:rPr>
-              <a:t>Plan(計画)→Do(実行)→Check(検証)→Act(改善)を回す業務サイクル。</a:t>
+              <a:t>商用利用可の写真素材サイト(Unsplash, ぱくたそ, photoAC 等)。</a:t>
             </a:r>
             <a:endParaRPr lang="en-US" sz="1100" dirty="0"/>
           </a:p>
@@ -2917,7 +2917,7 @@
                 <a:ea typeface="Yu Gothic UI" pitchFamily="34" charset="-122"/>
                 <a:cs typeface="Yu Gothic UI" pitchFamily="34" charset="-120"/>
               </a:rPr>
-              <a:t>CVR(コンバージョン率): </a:t>
+              <a:t>リッチメニュー: </a:t>
             </a:r>
             <a:pPr indent="0" marL="0">
               <a:buNone/>
@@ -2931,7 +2931,7 @@
                 <a:ea typeface="Yu Gothic UI" pitchFamily="34" charset="-122"/>
                 <a:cs typeface="Yu Gothic UI" pitchFamily="34" charset="-120"/>
               </a:rPr>
-              <a:t>保険LPの目安は1〜5%、低くても3ヶ月の傾向で判断   </a:t>
+              <a:t>最大6分割、各タップ領域に URL や応答を割り当てられる   </a:t>
             </a:r>
             <a:pPr indent="0" marL="0">
               <a:buNone/>
@@ -2959,7 +2959,7 @@
                 <a:ea typeface="Yu Gothic UI" pitchFamily="34" charset="-122"/>
                 <a:cs typeface="Yu Gothic UI" pitchFamily="34" charset="-120"/>
               </a:rPr>
-              <a:t>リーチ/開封率: </a:t>
+              <a:t>アイコン画像: </a:t>
             </a:r>
             <a:pPr indent="0" marL="0">
               <a:buNone/>
@@ -2973,7 +2973,7 @@
                 <a:ea typeface="Yu Gothic UI" pitchFamily="34" charset="-122"/>
                 <a:cs typeface="Yu Gothic UI" pitchFamily="34" charset="-120"/>
               </a:rPr>
-              <a:t>読まれない=つまらない の合図   </a:t>
+              <a:t>推奨640×640、人物写真かロゴが基本   </a:t>
             </a:r>
             <a:pPr indent="0" marL="0">
               <a:buNone/>
@@ -3001,7 +3001,7 @@
                 <a:ea typeface="Yu Gothic UI" pitchFamily="34" charset="-122"/>
                 <a:cs typeface="Yu Gothic UI" pitchFamily="34" charset="-120"/>
               </a:rPr>
-              <a:t>A/B テスト: </a:t>
+              <a:t>画像生成AI: </a:t>
             </a:r>
             <a:pPr indent="0" marL="0">
               <a:buNone/>
@@ -3015,7 +3015,7 @@
                 <a:ea typeface="Yu Gothic UI" pitchFamily="34" charset="-122"/>
                 <a:cs typeface="Yu Gothic UI" pitchFamily="34" charset="-120"/>
               </a:rPr>
-              <a:t>まずは件名や CTA 文言から試すと差が出やすい   </a:t>
+              <a:t>スタイル指示と被写体指示を分けて書くと安定   </a:t>
             </a:r>
             <a:pPr indent="0" marL="0">
               <a:buNone/>
@@ -3043,7 +3043,7 @@
                 <a:ea typeface="Yu Gothic UI" pitchFamily="34" charset="-122"/>
                 <a:cs typeface="Yu Gothic UI" pitchFamily="34" charset="-120"/>
               </a:rPr>
-              <a:t>PDCA: </a:t>
+              <a:t>ストックフォト: </a:t>
             </a:r>
             <a:pPr indent="0" marL="0">
               <a:buNone/>
@@ -3057,7 +3057,7 @@
                 <a:ea typeface="Yu Gothic UI" pitchFamily="34" charset="-122"/>
                 <a:cs typeface="Yu Gothic UI" pitchFamily="34" charset="-120"/>
               </a:rPr>
-              <a:t>AIに「Check と Act」を手伝わせると速い   </a:t>
+              <a:t>クレジット表記の有無を毎回確認   </a:t>
             </a:r>
             <a:endParaRPr lang="en-US" sz="950" dirty="0"/>
           </a:p>
@@ -3148,7 +3148,7 @@
                 <a:ea typeface="Yu Gothic UI Semibold" pitchFamily="34" charset="-122"/>
                 <a:cs typeface="Yu Gothic UI Semibold" pitchFamily="34" charset="-120"/>
               </a:rPr>
-              <a:t>演習1 LP の効果を AI で分析</a:t>
+              <a:t>演習1 リッチメニューを AI で作成</a:t>
             </a:r>
             <a:endParaRPr lang="en-US" sz="2200" dirty="0"/>
           </a:p>
@@ -3276,7 +3276,7 @@
                 <a:ea typeface="Yu Gothic UI" pitchFamily="34" charset="-122"/>
                 <a:cs typeface="Yu Gothic UI" pitchFamily="34" charset="-120"/>
               </a:rPr>
-              <a:t>【場面】LP公開から2週間。アクセス解析(Google Analytics 等)はあるが、</a:t>
+              <a:t>【場面】公式LINE のトーク画面下に常時表示される「リッチメニュー」を作りたい。</a:t>
             </a:r>
             <a:endParaRPr lang="en-US" sz="1150" dirty="0"/>
           </a:p>
@@ -3296,7 +3296,7 @@
                 <a:ea typeface="Yu Gothic UI" pitchFamily="34" charset="-122"/>
                 <a:cs typeface="Yu Gothic UI" pitchFamily="34" charset="-120"/>
               </a:rPr>
-              <a:t>数字を見てもどう改善すればいいか分からない。</a:t>
+              <a:t>次回 LINE 設定する際に、画像ファイルとタップ座標表が手元にある状態にしたい。</a:t>
             </a:r>
             <a:endParaRPr lang="en-US" sz="1150" dirty="0"/>
           </a:p>
@@ -3425,7 +3425,7 @@
                 <a:ea typeface="Yu Gothic UI" pitchFamily="34" charset="-122"/>
                 <a:cs typeface="Yu Gothic UI" pitchFamily="34" charset="-120"/>
               </a:rPr>
-              <a:t>スクショまたはCSV をそのままチャット欄に貼り、「分析して」と頼む</a:t>
+              <a:t>画像生成は Gemini / Genspark / Canva のいずれか</a:t>
             </a:r>
             <a:endParaRPr lang="en-US" sz="1150" dirty="0"/>
           </a:p>
@@ -3446,7 +3446,7 @@
                 <a:ea typeface="Yu Gothic UI" pitchFamily="34" charset="-122"/>
                 <a:cs typeface="Yu Gothic UI" pitchFamily="34" charset="-120"/>
               </a:rPr>
-              <a:t>「離脱ポイント」「読了率」「CTA クリック率」の観点を AI に明示</a:t>
+              <a:t>LP と同じメインカラーを画像生成 AI に「カラーコードで」明示</a:t>
             </a:r>
             <a:endParaRPr lang="en-US" sz="1150" dirty="0"/>
           </a:p>
@@ -3467,7 +3467,28 @@
                 <a:ea typeface="Yu Gothic UI" pitchFamily="34" charset="-122"/>
                 <a:cs typeface="Yu Gothic UI" pitchFamily="34" charset="-120"/>
               </a:rPr>
-              <a:t>改善案は具体的アクション(変更箇所+文言案)まで書かせる</a:t>
+              <a:t>タップ領域はアイコン中心で文字は最小限(3文字以内/タップ)</a:t>
+            </a:r>
+            <a:endParaRPr lang="en-US" sz="1150" dirty="0"/>
+          </a:p>
+          <a:p>
+            <a:pPr marL="342900" indent="-342900">
+              <a:spcAft>
+                <a:spcPts val="400"/>
+              </a:spcAft>
+              <a:buSzPct val="100000"/>
+              <a:buChar char="●"/>
+            </a:pPr>
+            <a:r>
+              <a:rPr lang="en-US" sz="1150" dirty="0">
+                <a:solidFill>
+                  <a:srgbClr val="1A1A1A"/>
+                </a:solidFill>
+                <a:latin typeface="Yu Gothic UI" pitchFamily="34" charset="0"/>
+                <a:ea typeface="Yu Gothic UI" pitchFamily="34" charset="-122"/>
+                <a:cs typeface="Yu Gothic UI" pitchFamily="34" charset="-120"/>
+              </a:rPr>
+              <a:t>ワーク01 で作った LP の CTA と「予約」リンクを揃える</a:t>
             </a:r>
             <a:endParaRPr lang="en-US" sz="1150" dirty="0"/>
           </a:p>
@@ -3596,7 +3617,7 @@
                 <a:ea typeface="Yu Gothic UI" pitchFamily="34" charset="-122"/>
                 <a:cs typeface="Yu Gothic UI" pitchFamily="34" charset="-120"/>
               </a:rPr>
-              <a:t>【ゴール】過去2週間の LP アクセスデータを AI に渡し、</a:t>
+              <a:t>【ゴール】6分割または3分割のリッチメニュー画像(2500×1686 PNG)を1枚完成</a:t>
             </a:r>
             <a:endParaRPr lang="en-US" sz="1150" dirty="0"/>
           </a:p>
@@ -3617,7 +3638,7 @@
                 <a:ea typeface="Yu Gothic UI" pitchFamily="34" charset="-122"/>
                 <a:cs typeface="Yu Gothic UI" pitchFamily="34" charset="-120"/>
               </a:rPr>
-              <a:t>・現状の CVR と離脱ポイントを言語化</a:t>
+              <a:t>タップ領域に「予約 / 相談 / 資料」など3つ以上の機能を割り当てる</a:t>
             </a:r>
             <a:endParaRPr lang="en-US" sz="1150" dirty="0"/>
           </a:p>
@@ -3638,7 +3659,7 @@
                 <a:ea typeface="Yu Gothic UI" pitchFamily="34" charset="-122"/>
                 <a:cs typeface="Yu Gothic UI" pitchFamily="34" charset="-120"/>
               </a:rPr>
-              <a:t>・改善案を「優先度高/中/低」で5つ提示</a:t>
+              <a:t>タップ座標と遷移先 URL の対応表をスプシに書き出す</a:t>
             </a:r>
             <a:endParaRPr lang="en-US" sz="1150" dirty="0"/>
           </a:p>
@@ -3659,7 +3680,7 @@
                 <a:ea typeface="Yu Gothic UI" pitchFamily="34" charset="-122"/>
                 <a:cs typeface="Yu Gothic UI" pitchFamily="34" charset="-120"/>
               </a:rPr>
-              <a:t>・来週試す改善1点を決める</a:t>
+              <a:t>画像ファイルを Google ドライブの「次回引き継ぎ」フォルダに保存</a:t>
             </a:r>
             <a:endParaRPr lang="en-US" sz="1150" dirty="0"/>
           </a:p>
@@ -3750,7 +3771,7 @@
                 <a:ea typeface="Yu Gothic UI Semibold" pitchFamily="34" charset="-122"/>
                 <a:cs typeface="Yu Gothic UI Semibold" pitchFamily="34" charset="-120"/>
               </a:rPr>
-              <a:t>演習1 LP の効果を AI で分析 — 観点別チェック</a:t>
+              <a:t>演習1 リッチメニューを AI で作成 — 観点別チェック</a:t>
             </a:r>
             <a:endParaRPr lang="en-US" sz="2200" dirty="0"/>
           </a:p>
@@ -3914,7 +3935,7 @@
                 <a:ea typeface="Yu Gothic UI Semibold" pitchFamily="34" charset="-122"/>
                 <a:cs typeface="Yu Gothic UI Semibold" pitchFamily="34" charset="-120"/>
               </a:rPr>
-              <a:t>A. データの渡し方</a:t>
+              <a:t>A. デザインの一貫性</a:t>
             </a:r>
             <a:endParaRPr lang="en-US" sz="1200" dirty="0"/>
           </a:p>
@@ -3967,7 +3988,7 @@
                 <a:ea typeface="Yu Gothic UI" pitchFamily="34" charset="-122"/>
                 <a:cs typeface="Yu Gothic UI" pitchFamily="34" charset="-120"/>
               </a:rPr>
-              <a:t>生データだけでなく「目的(=私が知りたいこと)」も伝えているか</a:t>
+              <a:t>LP と同じ配色・トーンで「同じ人の発信」と分かるか</a:t>
             </a:r>
             <a:endParaRPr lang="en-US" sz="1050" dirty="0"/>
           </a:p>
@@ -4020,7 +4041,7 @@
                 <a:ea typeface="Yu Gothic UI" pitchFamily="34" charset="-122"/>
                 <a:cs typeface="Yu Gothic UI" pitchFamily="34" charset="-120"/>
               </a:rPr>
-              <a:t>「LP 改善の優先順位を決めたい」と先に目的を書いてから貼る</a:t>
+              <a:t>「LP の色コード ●●● と同じで作って」と画像生成 AI に明示</a:t>
             </a:r>
             <a:endParaRPr lang="en-US" sz="1050" dirty="0"/>
           </a:p>
@@ -4145,7 +4166,7 @@
                 <a:ea typeface="Yu Gothic UI Semibold" pitchFamily="34" charset="-122"/>
                 <a:cs typeface="Yu Gothic UI Semibold" pitchFamily="34" charset="-120"/>
               </a:rPr>
-              <a:t>B. 比較軸</a:t>
+              <a:t>B. タップ動線の自然さ</a:t>
             </a:r>
             <a:endParaRPr lang="en-US" sz="1200" dirty="0"/>
           </a:p>
@@ -4198,7 +4219,7 @@
                 <a:ea typeface="Yu Gothic UI" pitchFamily="34" charset="-122"/>
                 <a:cs typeface="Yu Gothic UI" pitchFamily="34" charset="-120"/>
               </a:rPr>
-              <a:t>「先週と今週」「LP公開前後」など比較軸を含めて見ているか</a:t>
+              <a:t>タップ後すぐに「次の一歩」が分かる構成になっているか</a:t>
             </a:r>
             <a:endParaRPr lang="en-US" sz="1050" dirty="0"/>
           </a:p>
@@ -4251,7 +4272,7 @@
                 <a:ea typeface="Yu Gothic UI" pitchFamily="34" charset="-122"/>
                 <a:cs typeface="Yu Gothic UI" pitchFamily="34" charset="-120"/>
               </a:rPr>
-              <a:t>AI に「比較できる軸を3つ提案して」と先に聞いてから分析させる</a:t>
+              <a:t>予約ボタン → 即「いつが良いか」を聞くメッセージへ繋がるよう設計</a:t>
             </a:r>
             <a:endParaRPr lang="en-US" sz="1050" dirty="0"/>
           </a:p>
@@ -4376,7 +4397,7 @@
                 <a:ea typeface="Yu Gothic UI Semibold" pitchFamily="34" charset="-122"/>
                 <a:cs typeface="Yu Gothic UI Semibold" pitchFamily="34" charset="-120"/>
               </a:rPr>
-              <a:t>C. 実行可能性</a:t>
+              <a:t>C. ファイル仕様の正しさ</a:t>
             </a:r>
             <a:endParaRPr lang="en-US" sz="1200" dirty="0"/>
           </a:p>
@@ -4429,7 +4450,7 @@
                 <a:ea typeface="Yu Gothic UI" pitchFamily="34" charset="-122"/>
                 <a:cs typeface="Yu Gothic UI" pitchFamily="34" charset="-120"/>
               </a:rPr>
-              <a:t>改善案が「自分が今週中に1人でできる」レベルに落ちているか</a:t>
+              <a:t>2500×1686 PNG / 1MB 以下 / 文字は読める大きさか</a:t>
             </a:r>
             <a:endParaRPr lang="en-US" sz="1050" dirty="0"/>
           </a:p>
@@ -4482,7 +4503,7 @@
                 <a:ea typeface="Yu Gothic UI" pitchFamily="34" charset="-122"/>
                 <a:cs typeface="Yu Gothic UI" pitchFamily="34" charset="-120"/>
               </a:rPr>
-              <a:t>「自分1人で30分以内」の制約を AI に伝えると現実的な案になる</a:t>
+              <a:t>スマホ画面で 1/3 サイズに縮小しても文字が読めるかをチェック</a:t>
             </a:r>
             <a:endParaRPr lang="en-US" sz="1050" dirty="0"/>
           </a:p>
@@ -4573,7 +4594,7 @@
                 <a:ea typeface="Yu Gothic UI Semibold" pitchFamily="34" charset="-122"/>
                 <a:cs typeface="Yu Gothic UI Semibold" pitchFamily="34" charset="-120"/>
               </a:rPr>
-              <a:t>演習2 リッチメニュー+導線完成</a:t>
+              <a:t>演習2 アイコン画像の作成または検索</a:t>
             </a:r>
             <a:endParaRPr lang="en-US" sz="2200" dirty="0"/>
           </a:p>
@@ -4701,7 +4722,7 @@
                 <a:ea typeface="Yu Gothic UI" pitchFamily="34" charset="-122"/>
                 <a:cs typeface="Yu Gothic UI" pitchFamily="34" charset="-120"/>
               </a:rPr>
-              <a:t>【場面】LP→公式LINE 登録 まではできた。</a:t>
+              <a:t>【場面】公式LINE のプロフィール画像(=アイコン)が、第一印象を決める。</a:t>
             </a:r>
             <a:endParaRPr lang="en-US" sz="1150" dirty="0"/>
           </a:p>
@@ -4721,7 +4742,7 @@
                 <a:ea typeface="Yu Gothic UI" pitchFamily="34" charset="-122"/>
                 <a:cs typeface="Yu Gothic UI" pitchFamily="34" charset="-120"/>
               </a:rPr>
-              <a:t>しかし LINE 内の動線(リッチメニュー)がなく、登録後の次の一歩が示せていない。</a:t>
+              <a:t>人物写真か、AI 生成のロゴ風画像か、ストックフォトから選ぶか — 自分に合う1枚を確定する。</a:t>
             </a:r>
             <a:endParaRPr lang="en-US" sz="1150" dirty="0"/>
           </a:p>
@@ -4850,7 +4871,7 @@
                 <a:ea typeface="Yu Gothic UI" pitchFamily="34" charset="-122"/>
                 <a:cs typeface="Yu Gothic UI" pitchFamily="34" charset="-120"/>
               </a:rPr>
-              <a:t>画像生成は Gemini/Genspark/Canva のいずれか</a:t>
+              <a:t>人物写真の場合: 明るい背景、笑顔、上半身、正方形にトリミング</a:t>
             </a:r>
             <a:endParaRPr lang="en-US" sz="1150" dirty="0"/>
           </a:p>
@@ -4871,7 +4892,7 @@
                 <a:ea typeface="Yu Gothic UI" pitchFamily="34" charset="-122"/>
                 <a:cs typeface="Yu Gothic UI" pitchFamily="34" charset="-120"/>
               </a:rPr>
-              <a:t>タップ数は3つに絞り、優先度を「予約&gt;相談&gt;資料」の順に</a:t>
+              <a:t>AI 生成の場合: 「保険プランナー向け、信頼感のあるロゴ風アイコン、●●色」と指示</a:t>
             </a:r>
             <a:endParaRPr lang="en-US" sz="1150" dirty="0"/>
           </a:p>
@@ -4892,7 +4913,28 @@
                 <a:ea typeface="Yu Gothic UI" pitchFamily="34" charset="-122"/>
                 <a:cs typeface="Yu Gothic UI" pitchFamily="34" charset="-120"/>
               </a:rPr>
-              <a:t>テストは自分の個人LINE で必ず1往復</a:t>
+              <a:t>ストックフォトの場合: 商用利用可+クレジット表記の有無を確認</a:t>
+            </a:r>
+            <a:endParaRPr lang="en-US" sz="1150" dirty="0"/>
+          </a:p>
+          <a:p>
+            <a:pPr marL="342900" indent="-342900">
+              <a:spcAft>
+                <a:spcPts val="400"/>
+              </a:spcAft>
+              <a:buSzPct val="100000"/>
+              <a:buChar char="●"/>
+            </a:pPr>
+            <a:r>
+              <a:rPr lang="en-US" sz="1150" dirty="0">
+                <a:solidFill>
+                  <a:srgbClr val="1A1A1A"/>
+                </a:solidFill>
+                <a:latin typeface="Yu Gothic UI" pitchFamily="34" charset="0"/>
+                <a:ea typeface="Yu Gothic UI" pitchFamily="34" charset="-122"/>
+                <a:cs typeface="Yu Gothic UI" pitchFamily="34" charset="-120"/>
+              </a:rPr>
+              <a:t>アイコンと LP/リッチメニューの「色味の一貫性」を必ず確認</a:t>
             </a:r>
             <a:endParaRPr lang="en-US" sz="1150" dirty="0"/>
           </a:p>
@@ -5021,7 +5063,7 @@
                 <a:ea typeface="Yu Gothic UI" pitchFamily="34" charset="-122"/>
                 <a:cs typeface="Yu Gothic UI" pitchFamily="34" charset="-120"/>
               </a:rPr>
-              <a:t>【ゴール】公式LINE のリッチメニューを設置し、LP→LINE→予約 を一本化</a:t>
+              <a:t>【ゴール】640×640 のアイコン画像(PNG/JPG)を1枚確定</a:t>
             </a:r>
             <a:endParaRPr lang="en-US" sz="1150" dirty="0"/>
           </a:p>
@@ -5042,7 +5084,7 @@
                 <a:ea typeface="Yu Gothic UI" pitchFamily="34" charset="-122"/>
                 <a:cs typeface="Yu Gothic UI" pitchFamily="34" charset="-120"/>
               </a:rPr>
-              <a:t>・3軸トーンに合うリッチメニュー画像を AI 生成</a:t>
+              <a:t>「人物写真」「AI生成ロゴ」「ストックフォト」のいずれかから決定</a:t>
             </a:r>
             <a:endParaRPr lang="en-US" sz="1150" dirty="0"/>
           </a:p>
@@ -5063,7 +5105,7 @@
                 <a:ea typeface="Yu Gothic UI" pitchFamily="34" charset="-122"/>
                 <a:cs typeface="Yu Gothic UI" pitchFamily="34" charset="-120"/>
               </a:rPr>
-              <a:t>・タップ領域に「予約」「資料」「相談」を配置</a:t>
+              <a:t>3軸のトーン(信頼感/親しみ など)に合う画像を選ぶ</a:t>
             </a:r>
             <a:endParaRPr lang="en-US" sz="1150" dirty="0"/>
           </a:p>
@@ -5084,7 +5126,7 @@
                 <a:ea typeface="Yu Gothic UI" pitchFamily="34" charset="-122"/>
                 <a:cs typeface="Yu Gothic UI" pitchFamily="34" charset="-120"/>
               </a:rPr>
-              <a:t>・テスト配信で意図通り遷移するかを確認</a:t>
+              <a:t>次回設定でそのまま使える形で「次回引き継ぎ」フォルダに保存</a:t>
             </a:r>
             <a:endParaRPr lang="en-US" sz="1150" dirty="0"/>
           </a:p>
@@ -5175,7 +5217,7 @@
                 <a:ea typeface="Yu Gothic UI Semibold" pitchFamily="34" charset="-122"/>
                 <a:cs typeface="Yu Gothic UI Semibold" pitchFamily="34" charset="-120"/>
               </a:rPr>
-              <a:t>演習2 リッチメニュー+導線完成 — 観点別チェック</a:t>
+              <a:t>演習2 アイコン画像の作成または検索 — 観点別チェック</a:t>
             </a:r>
             <a:endParaRPr lang="en-US" sz="2200" dirty="0"/>
           </a:p>
@@ -5339,7 +5381,7 @@
                 <a:ea typeface="Yu Gothic UI Semibold" pitchFamily="34" charset="-122"/>
                 <a:cs typeface="Yu Gothic UI Semibold" pitchFamily="34" charset="-120"/>
               </a:rPr>
-              <a:t>A. デザインの一貫性</a:t>
+              <a:t>A. 第一印象の強度</a:t>
             </a:r>
             <a:endParaRPr lang="en-US" sz="1200" dirty="0"/>
           </a:p>
@@ -5392,7 +5434,7 @@
                 <a:ea typeface="Yu Gothic UI" pitchFamily="34" charset="-122"/>
                 <a:cs typeface="Yu Gothic UI" pitchFamily="34" charset="-120"/>
               </a:rPr>
-              <a:t>LP と同じ配色/フォント感で「同じ人の発信」と分かるか</a:t>
+              <a:t>小さいサムネイル(80×80px 程度)でも何の人か分かるか</a:t>
             </a:r>
             <a:endParaRPr lang="en-US" sz="1050" dirty="0"/>
           </a:p>
@@ -5445,7 +5487,7 @@
                 <a:ea typeface="Yu Gothic UI" pitchFamily="34" charset="-122"/>
                 <a:cs typeface="Yu Gothic UI" pitchFamily="34" charset="-120"/>
               </a:rPr>
-              <a:t>「LP の色コードと同じで作って」と画像生成 AI に明示</a:t>
+              <a:t>プレビューを縮小して確認、見えにくければトリミング or 拡大</a:t>
             </a:r>
             <a:endParaRPr lang="en-US" sz="1050" dirty="0"/>
           </a:p>
@@ -5570,7 +5612,7 @@
                 <a:ea typeface="Yu Gothic UI Semibold" pitchFamily="34" charset="-122"/>
                 <a:cs typeface="Yu Gothic UI Semibold" pitchFamily="34" charset="-120"/>
               </a:rPr>
-              <a:t>B. 押したくなる導線</a:t>
+              <a:t>B. 3軸との一致</a:t>
             </a:r>
             <a:endParaRPr lang="en-US" sz="1200" dirty="0"/>
           </a:p>
@@ -5623,7 +5665,7 @@
                 <a:ea typeface="Yu Gothic UI" pitchFamily="34" charset="-122"/>
                 <a:cs typeface="Yu Gothic UI" pitchFamily="34" charset="-120"/>
               </a:rPr>
-              <a:t>タップ後すぐに「次の一歩」が分かる構成になっているか</a:t>
+              <a:t>アイコンを見ただけで「3軸の立ち位置」が伝わるか</a:t>
             </a:r>
             <a:endParaRPr lang="en-US" sz="1050" dirty="0"/>
           </a:p>
@@ -5676,7 +5718,7 @@
                 <a:ea typeface="Yu Gothic UI" pitchFamily="34" charset="-122"/>
                 <a:cs typeface="Yu Gothic UI" pitchFamily="34" charset="-120"/>
               </a:rPr>
-              <a:t>予約ボタンを押すと、即「いつが良いか」を聞くメッセージにする</a:t>
+              <a:t>「3軸を AI に貼り、このトーンに合うアイコン案を5パターン」と頼む</a:t>
             </a:r>
             <a:endParaRPr lang="en-US" sz="1050" dirty="0"/>
           </a:p>
@@ -5801,7 +5843,7 @@
                 <a:ea typeface="Yu Gothic UI Semibold" pitchFamily="34" charset="-122"/>
                 <a:cs typeface="Yu Gothic UI Semibold" pitchFamily="34" charset="-120"/>
               </a:rPr>
-              <a:t>C. 計測の仕組み</a:t>
+              <a:t>C. 利用権の安全性</a:t>
             </a:r>
             <a:endParaRPr lang="en-US" sz="1200" dirty="0"/>
           </a:p>
@@ -5854,7 +5896,7 @@
                 <a:ea typeface="Yu Gothic UI" pitchFamily="34" charset="-122"/>
                 <a:cs typeface="Yu Gothic UI" pitchFamily="34" charset="-120"/>
               </a:rPr>
-              <a:t>「どのボタンが押されたか」を後で振り返れる仕組みがあるか</a:t>
+              <a:t>商用利用可で、トラブルにならない素材か</a:t>
             </a:r>
             <a:endParaRPr lang="en-US" sz="1050" dirty="0"/>
           </a:p>
@@ -5907,7 +5949,7 @@
                 <a:ea typeface="Yu Gothic UI" pitchFamily="34" charset="-122"/>
                 <a:cs typeface="Yu Gothic UI" pitchFamily="34" charset="-120"/>
               </a:rPr>
-              <a:t>UTMパラメータかタグ機能で「クリック元」を区別して保存させる</a:t>
+              <a:t>人物写真は本人の許可、ストックフォトはライセンス条項を保存しておく</a:t>
             </a:r>
             <a:endParaRPr lang="en-US" sz="1050" dirty="0"/>
           </a:p>
@@ -6103,7 +6145,7 @@
                 <a:ea typeface="Yu Gothic UI Semibold" pitchFamily="34" charset="-122"/>
                 <a:cs typeface="Yu Gothic UI Semibold" pitchFamily="34" charset="-120"/>
               </a:rPr>
-              <a:t>数字で判断、AIで改善</a:t>
+              <a:t>リッチメニューも AI で</a:t>
             </a:r>
             <a:endParaRPr lang="en-US" sz="1500" dirty="0"/>
           </a:p>
@@ -6142,7 +6184,7 @@
                 <a:ea typeface="Yu Gothic UI" pitchFamily="34" charset="-122"/>
                 <a:cs typeface="Yu Gothic UI" pitchFamily="34" charset="-120"/>
               </a:rPr>
-              <a:t>CVRと開封率を週1で確認、AIに改善案を出してもらう。</a:t>
+              <a:t>デザイン知識ゼロでも、AI とテンプレで「使える1枚」が今日完成する。</a:t>
             </a:r>
             <a:endParaRPr lang="en-US" sz="1100" dirty="0"/>
           </a:p>
@@ -6247,7 +6289,7 @@
                 <a:ea typeface="Yu Gothic UI Semibold" pitchFamily="34" charset="-122"/>
                 <a:cs typeface="Yu Gothic UI Semibold" pitchFamily="34" charset="-120"/>
               </a:rPr>
-              <a:t>導線は一本化</a:t>
+              <a:t>アイコンは一貫性</a:t>
             </a:r>
             <a:endParaRPr lang="en-US" sz="1500" dirty="0"/>
           </a:p>
@@ -6286,7 +6328,7 @@
                 <a:ea typeface="Yu Gothic UI" pitchFamily="34" charset="-122"/>
                 <a:cs typeface="Yu Gothic UI" pitchFamily="34" charset="-120"/>
               </a:rPr>
-              <a:t>LP→LINE→予約 のどこを切っても「次の一歩」が見えるよう設計。</a:t>
+              <a:t>LP・リッチメニューと同じトーンで揃えると、信頼感が一気に上がる。</a:t>
             </a:r>
             <a:endParaRPr lang="en-US" sz="1100" dirty="0"/>
           </a:p>
@@ -6391,7 +6433,7 @@
                 <a:ea typeface="Yu Gothic UI Semibold" pitchFamily="34" charset="-122"/>
                 <a:cs typeface="Yu Gothic UI Semibold" pitchFamily="34" charset="-120"/>
               </a:rPr>
-              <a:t>まず3ヶ月続ける</a:t>
+              <a:t>次回はアップロードだけ</a:t>
             </a:r>
             <a:endParaRPr lang="en-US" sz="1500" dirty="0"/>
           </a:p>
@@ -6430,7 +6472,7 @@
                 <a:ea typeface="Yu Gothic UI" pitchFamily="34" charset="-122"/>
                 <a:cs typeface="Yu Gothic UI" pitchFamily="34" charset="-120"/>
               </a:rPr>
-              <a:t>PDCA は3ヶ月続けないと傾向が見えない。日次は気にしない。</a:t>
+              <a:t>画像と座標表をフォルダにまとめれば、次回の LINE 設定は10分で終わる。</a:t>
             </a:r>
             <a:endParaRPr lang="en-US" sz="1100" dirty="0"/>
           </a:p>
